--- a/ground-vehicle/docs/courses/beginner-switch/l2_motor_control.pptx
+++ b/ground-vehicle/docs/courses/beginner-switch/l2_motor_control.pptx
@@ -753,7 +753,7 @@
               <a:rPr sz="1200">
                 <a:latin typeface="Calibri"/>
               </a:rPr>
-              <a:t>On the Switch track, mention that the numbered channel is an older way of doing the same job - it is a board package difference, not a different idea.</a:t>
+              <a:t>Mention that the numbered channel is an older way of doing the same job - it is a board package difference, not a different idea.</a:t>
             </a:r>
           </a:p>
         </p:txBody>
@@ -1020,7 +1020,7 @@
               <a:rPr sz="1200">
                 <a:latin typeface="Calibri"/>
               </a:rPr>
-              <a:t>If a group finds a duty so low the wheel will not start at all, tell them what they have found and move on. We are deliberately not chasing that number in this course.</a:t>
+              <a:t>If a group finds a duty so low the wheel will not start at all, tell them they have found something real - and that the next activity, l2b_speed_ramp, is built to pin that exact number down.</a:t>
             </a:r>
           </a:p>
           <a:p>
@@ -1029,6 +1029,22 @@
                 <a:latin typeface="Calibri"/>
               </a:rPr>
               <a:t>Step 5 moves the pins to another motor. If nothing happens, they have almost certainly typed one pin of a pair.</a:t>
+            </a:r>
+          </a:p>
+          <a:p>
+            <a:r>
+              <a:rPr sz="1200">
+                <a:latin typeface="Calibri"/>
+              </a:rPr>
+              <a:t>ANSWER, at 60: slower AND with less force. A lower duty means the pin is on for less of each cycle, so the motor gets less average power. Near the bottom it may not have enough to overcome friction at all.</a:t>
+            </a:r>
+          </a:p>
+          <a:p>
+            <a:r>
+              <a:rPr sz="1200">
+                <a:latin typeface="Calibri"/>
+              </a:rPr>
+              <a:t>ANSWER, swapping pins: the motor turns whichever way the current flows through it. Swap which pin is driven and the current runs through the motor the other way, so it spins the other way. Nothing was rewired - only which end is positive.</a:t>
             </a:r>
           </a:p>
         </p:txBody>
@@ -1198,7 +1214,23 @@
               <a:rPr sz="1200">
                 <a:latin typeface="Calibri"/>
               </a:rPr>
-              <a:t>Question two - where the speed stops being proportional - is the honest answer: at the bottom, where friction wins.</a:t>
+              <a:t>The ramp holds each duty value for STEP_MS so that the number on the screen and the wheel in front of them line up. Steps of 5 get them within 5; step 4 (DUTY_STEP = 1) gets the exact number, at the cost of a much slower ramp. Groups that finish early can check whether all four wheels start at the same duty - they usually do not.</a:t>
+            </a:r>
+          </a:p>
+          <a:p>
+            <a:r>
+              <a:rPr sz="1200">
+                <a:latin typeface="Calibri"/>
+              </a:rPr>
+              <a:t>ANSWER, proportional: no. At the bottom friction wins - the wheels do nothing at all until the duty is high enough to break them loose, then they jump into motion. Above that it is roughly a straight line, and at the very top the sound stops changing because the motor is close to its full speed.</a:t>
+            </a:r>
+          </a:p>
+          <a:p>
+            <a:r>
+              <a:rPr sz="1200">
+                <a:latin typeface="Calibri"/>
+              </a:rPr>
+              <a:t>ANSWER, the whine: it is the PWM switching itself. At 300 Hz the motor coils buzz 300 times a second, well inside human hearing. At 20 kHz the buzz is still there, but above what a human ear can hear - which is exactly why we chose it.</a:t>
             </a:r>
           </a:p>
         </p:txBody>
@@ -2363,7 +2395,7 @@
               <a:rPr sz="1200">
                 <a:latin typeface="Calibri"/>
               </a:rPr>
-              <a:t>Then the whole path is just adding the legs up, which is what the table on the right does.</a:t>
+              <a:t>Then the whole path is just adding the legs up, which is what the table on the right does. The four legs are the baseball diamond on the next slide: home to first at 45 degrees, then three left turns, which is why the bearings go 45, 315, 225, 135.</a:t>
             </a:r>
           </a:p>
           <a:p>
@@ -3150,6 +3182,14 @@
               <a:t>If a group's vehicle curves badly on the straights, one motor is weaker. That is a real finding and worth saying out loud.</a:t>
             </a:r>
           </a:p>
+          <a:p>
+            <a:r>
+              <a:rPr sz="1200">
+                <a:latin typeface="Calibri"/>
+              </a:rPr>
+              <a:t>ANSWERS are different for every vehicle, so check the working rather than the number. Speed: the side length they measured divided by FORWARD_MS / 1000 - the side in feet divided by 1 seconds. Turn rate: 90 degrees divided by the TUNED TURN_MS in seconds, once the square closes. A group whose square closes at TURN_MS = 450 has a turn rate of 90 / 0.45 = 200 degrees per second.</a:t>
+            </a:r>
+          </a:p>
         </p:txBody>
       </p:sp>
       <p:sp>
@@ -3511,7 +3551,7 @@
               <a:rPr sz="1200">
                 <a:latin typeface="Calibri"/>
               </a:rPr>
-              <a:t>For question 7, a rectangle means the two straights differ - FORWARD_MS is fine and the corners are not square, so TURN_MS is the number to change.</a:t>
+              <a:t>For question 7: TURN_MS, and make it SMALLER. Every corner turns too far because the spin runs too long. Undershooting would be the opposite - make it bigger. FORWARD_MS only changes the length of the sides, never the angles.</a:t>
             </a:r>
           </a:p>
           <a:p>
@@ -13532,7 +13572,7 @@
                 <a:spcPct val="100000"/>
               </a:lnSpc>
               <a:spcAft>
-                <a:spcPts val="800"/>
+                <a:spcPts val="400"/>
               </a:spcAft>
               <a:defRPr sz="1800" b="0">
                 <a:solidFill>
@@ -13557,7 +13597,7 @@
                 <a:spcPct val="100000"/>
               </a:lnSpc>
               <a:spcAft>
-                <a:spcPts val="800"/>
+                <a:spcPts val="400"/>
               </a:spcAft>
               <a:defRPr sz="1800" b="0">
                 <a:solidFill>
@@ -13573,7 +13613,7 @@
                 </a:solidFill>
                 <a:latin typeface="Calibri"/>
               </a:rPr>
-              <a:t>2.  Watch the wheels and read the Serial Monitor at the same time.</a:t>
+              <a:t>2.  Watch the wheels and the Serial Monitor together. Each duty is held for 300 ms.</a:t>
             </a:r>
           </a:p>
           <a:p>
@@ -13582,7 +13622,7 @@
                 <a:spcPct val="100000"/>
               </a:lnSpc>
               <a:spcAft>
-                <a:spcPts val="800"/>
+                <a:spcPts val="400"/>
               </a:spcAft>
               <a:defRPr sz="1800" b="0">
                 <a:solidFill>
@@ -13598,7 +13638,7 @@
                 </a:solidFill>
                 <a:latin typeface="Calibri"/>
               </a:rPr>
-              <a:t>3.  Note the duty value at which the wheels START to turn.</a:t>
+              <a:t>3.  Write down the duty at which the wheels START to turn.</a:t>
             </a:r>
           </a:p>
           <a:p>
@@ -13607,7 +13647,7 @@
                 <a:spcPct val="100000"/>
               </a:lnSpc>
               <a:spcAft>
-                <a:spcPts val="800"/>
+                <a:spcPts val="400"/>
               </a:spcAft>
               <a:defRPr sz="1800" b="0">
                 <a:solidFill>
@@ -13623,7 +13663,7 @@
                 </a:solidFill>
                 <a:latin typeface="Calibri"/>
               </a:rPr>
-              <a:t>4.  Note the value at which the sound stops changing.</a:t>
+              <a:t>4.  Set DUTY_STEP to 1 to pin that number down exactly.</a:t>
             </a:r>
           </a:p>
           <a:p>
@@ -13632,7 +13672,7 @@
                 <a:spcPct val="100000"/>
               </a:lnSpc>
               <a:spcAft>
-                <a:spcPts val="800"/>
+                <a:spcPts val="400"/>
               </a:spcAft>
               <a:defRPr sz="1800" b="0">
                 <a:solidFill>
@@ -13657,7 +13697,7 @@
                 <a:spcPct val="100000"/>
               </a:lnSpc>
               <a:spcAft>
-                <a:spcPts val="800"/>
+                <a:spcPts val="400"/>
               </a:spcAft>
               <a:defRPr sz="1800" b="0">
                 <a:solidFill>
@@ -13769,7 +13809,7 @@
                 </a:solidFill>
                 <a:latin typeface="Calibri"/>
               </a:rPr>
-              <a:t>All four wheels winding up from nothing to full speed and back, with the duty and the percentage printing as it goes.</a:t>
+              <a:t>All four wheels winding slowly up to full speed and back, the duty printing at each step.</a:t>
             </a:r>
           </a:p>
         </p:txBody>
@@ -26133,7 +26173,7 @@
                 </a:solidFill>
                 <a:latin typeface="Calibri"/>
               </a:rPr>
-              <a:t>135</a:t>
+              <a:t>315</a:t>
             </a:r>
           </a:p>
         </p:txBody>
@@ -26201,7 +26241,7 @@
                 </a:solidFill>
                 <a:latin typeface="Consolas"/>
               </a:rPr>
-              <a:t>+23.6</a:t>
+              <a:t>-23.6</a:t>
             </a:r>
           </a:p>
         </p:txBody>
@@ -26269,7 +26309,7 @@
                 </a:solidFill>
                 <a:latin typeface="Consolas"/>
               </a:rPr>
-              <a:t>-23.6</a:t>
+              <a:t>+23.6</a:t>
             </a:r>
           </a:p>
         </p:txBody>
@@ -26813,7 +26853,7 @@
                 </a:solidFill>
                 <a:latin typeface="Calibri"/>
               </a:rPr>
-              <a:t>315</a:t>
+              <a:t>135</a:t>
             </a:r>
           </a:p>
         </p:txBody>
@@ -26881,7 +26921,7 @@
                 </a:solidFill>
                 <a:latin typeface="Consolas"/>
               </a:rPr>
-              <a:t>-23.6</a:t>
+              <a:t>+23.6</a:t>
             </a:r>
           </a:p>
         </p:txBody>
@@ -26949,7 +26989,7 @@
                 </a:solidFill>
                 <a:latin typeface="Consolas"/>
               </a:rPr>
-              <a:t>+23.6</a:t>
+              <a:t>-23.6</a:t>
             </a:r>
           </a:p>
         </p:txBody>
@@ -34819,7 +34859,7 @@
                 </a:solidFill>
                 <a:latin typeface="Calibri"/>
               </a:rPr>
-              <a:t>7.  Your square comes out as a rectangle. Which number is wrong, and which way should you change it?</a:t>
+              <a:t>7.  Your vehicle overshoots every corner, so the square never closes. Which number do you change, and which way?</a:t>
             </a:r>
           </a:p>
           <a:p>
@@ -36101,7 +36141,7 @@
                 </a:solidFill>
                 <a:latin typeface="Calibri"/>
               </a:rPr>
-              <a:t>Needs an Electronic Speed Controller to energise three windings in the right order.</a:t>
+              <a:t>Needs an Electronic Speed Controller to energize three windings in the right order.</a:t>
             </a:r>
           </a:p>
           <a:p>
